--- a/presentation/Dawodia_Holding_Our_Values.pptx
+++ b/presentation/Dawodia_Holding_Our_Values.pptx
@@ -1610,8 +1610,8 @@
         </p:blipFill>
         <p:spPr>
           <a:xfrm>
-            <a:off x="548640" y="502920"/>
-            <a:ext cx="2377440" cy="742950"/>
+            <a:off x="548640" y="457200"/>
+            <a:ext cx="914400" cy="914400"/>
           </a:xfrm>
           <a:prstGeom prst="rect">
             <a:avLst/>
@@ -1626,8 +1626,8 @@
         </p:nvSpPr>
         <p:spPr>
           <a:xfrm>
-            <a:off x="548640" y="1737360"/>
-            <a:ext cx="5486400" cy="274320"/>
+            <a:off x="1645920" y="566928"/>
+            <a:ext cx="3657600" cy="694944"/>
           </a:xfrm>
           <a:prstGeom prst="rect">
             <a:avLst/>
@@ -1643,70 +1643,126 @@
               <a:buNone/>
             </a:pPr>
             <a:r>
-              <a:rPr lang="en-US" sz="1100" b="1" spc="500" kern="0" dirty="0">
-                <a:solidFill>
-                  <a:srgbClr val="C8A04A"/>
+              <a:rPr lang="en-US" sz="2000" b="1" spc="600" kern="0" dirty="0">
+                <a:solidFill>
+                  <a:srgbClr val="FFFFFF"/>
                 </a:solidFill>
                 <a:latin typeface="Arial" pitchFamily="34" charset="0"/>
                 <a:ea typeface="Arial" pitchFamily="34" charset="-122"/>
                 <a:cs typeface="Arial" pitchFamily="34" charset="-120"/>
               </a:rPr>
-              <a:t>COMPANY VALUES  ·  2026</a:t>
-            </a:r>
-            <a:endParaRPr lang="en-US" sz="1100" dirty="0"/>
-          </a:p>
-        </p:txBody>
-      </p:sp>
-      <p:sp>
-        <p:nvSpPr>
-          <p:cNvPr id="4" name="Text 1"/>
-          <p:cNvSpPr txBox="1"/>
-          <p:nvPr/>
-        </p:nvSpPr>
-        <p:spPr>
-          <a:xfrm>
-            <a:off x="548640" y="2057400"/>
-            <a:ext cx="6400800" cy="1463040"/>
-          </a:xfrm>
-          <a:prstGeom prst="rect">
-            <a:avLst/>
-          </a:prstGeom>
-          <a:noFill/>
-          <a:ln/>
-        </p:spPr>
-        <p:txBody>
-          <a:bodyPr wrap="square" lIns="0" tIns="0" rIns="0" bIns="0" rtlCol="0" anchor="t"/>
-          <a:lstStyle/>
+              <a:t>DAWODIA</a:t>
+            </a:r>
+            <a:endParaRPr lang="en-US" sz="2000" dirty="0"/>
+          </a:p>
           <a:p>
             <a:pPr indent="0" marL="0">
               <a:buNone/>
             </a:pPr>
             <a:r>
-              <a:rPr lang="en-US" sz="4400" b="1" dirty="0">
-                <a:solidFill>
-                  <a:srgbClr val="FFFFFF"/>
+              <a:rPr lang="en-US" sz="1100" spc="1000" kern="0" dirty="0">
+                <a:solidFill>
+                  <a:srgbClr val="D6D9DE"/>
                 </a:solidFill>
                 <a:latin typeface="Arial" pitchFamily="34" charset="0"/>
                 <a:ea typeface="Arial" pitchFamily="34" charset="-122"/>
                 <a:cs typeface="Arial" pitchFamily="34" charset="-120"/>
               </a:rPr>
-              <a:t>Our Values,</a:t>
-            </a:r>
-            <a:endParaRPr lang="en-US" sz="4400" dirty="0"/>
-          </a:p>
+              <a:t>HOLDING</a:t>
+            </a:r>
+            <a:endParaRPr lang="en-US" sz="2000" dirty="0"/>
+          </a:p>
+        </p:txBody>
+      </p:sp>
+      <p:sp>
+        <p:nvSpPr>
+          <p:cNvPr id="4" name="Text 1"/>
+          <p:cNvSpPr txBox="1"/>
+          <p:nvPr/>
+        </p:nvSpPr>
+        <p:spPr>
+          <a:xfrm>
+            <a:off x="548640" y="1737360"/>
+            <a:ext cx="5486400" cy="274320"/>
+          </a:xfrm>
+          <a:prstGeom prst="rect">
+            <a:avLst/>
+          </a:prstGeom>
+          <a:noFill/>
+          <a:ln/>
+        </p:spPr>
+        <p:txBody>
+          <a:bodyPr wrap="square" lIns="0" tIns="0" rIns="0" bIns="0" rtlCol="0" anchor="ctr"/>
+          <a:lstStyle/>
           <a:p>
             <a:pPr indent="0" marL="0">
               <a:buNone/>
             </a:pPr>
             <a:r>
-              <a:rPr lang="en-US" sz="4400" b="1" dirty="0">
-                <a:solidFill>
-                  <a:srgbClr val="FFFFFF"/>
+              <a:rPr lang="en-US" sz="1100" b="1" spc="500" kern="0" dirty="0">
+                <a:solidFill>
+                  <a:srgbClr val="D6D9DE"/>
                 </a:solidFill>
                 <a:latin typeface="Arial" pitchFamily="34" charset="0"/>
                 <a:ea typeface="Arial" pitchFamily="34" charset="-122"/>
                 <a:cs typeface="Arial" pitchFamily="34" charset="-120"/>
               </a:rPr>
+              <a:t>COMPANY VALUES  ·  2026</a:t>
+            </a:r>
+            <a:endParaRPr lang="en-US" sz="1100" dirty="0"/>
+          </a:p>
+        </p:txBody>
+      </p:sp>
+      <p:sp>
+        <p:nvSpPr>
+          <p:cNvPr id="5" name="Text 2"/>
+          <p:cNvSpPr txBox="1"/>
+          <p:nvPr/>
+        </p:nvSpPr>
+        <p:spPr>
+          <a:xfrm>
+            <a:off x="548640" y="2057400"/>
+            <a:ext cx="6400800" cy="1463040"/>
+          </a:xfrm>
+          <a:prstGeom prst="rect">
+            <a:avLst/>
+          </a:prstGeom>
+          <a:noFill/>
+          <a:ln/>
+        </p:spPr>
+        <p:txBody>
+          <a:bodyPr wrap="square" lIns="0" tIns="0" rIns="0" bIns="0" rtlCol="0" anchor="t"/>
+          <a:lstStyle/>
+          <a:p>
+            <a:pPr indent="0" marL="0">
+              <a:buNone/>
+            </a:pPr>
+            <a:r>
+              <a:rPr lang="en-US" sz="4400" b="1" dirty="0">
+                <a:solidFill>
+                  <a:srgbClr val="FFFFFF"/>
+                </a:solidFill>
+                <a:latin typeface="Arial" pitchFamily="34" charset="0"/>
+                <a:ea typeface="Arial" pitchFamily="34" charset="-122"/>
+                <a:cs typeface="Arial" pitchFamily="34" charset="-120"/>
+              </a:rPr>
+              <a:t>Our Values,</a:t>
+            </a:r>
+            <a:endParaRPr lang="en-US" sz="4400" dirty="0"/>
+          </a:p>
+          <a:p>
+            <a:pPr indent="0" marL="0">
+              <a:buNone/>
+            </a:pPr>
+            <a:r>
+              <a:rPr lang="en-US" sz="4400" b="1" dirty="0">
+                <a:solidFill>
+                  <a:srgbClr val="FFFFFF"/>
+                </a:solidFill>
+                <a:latin typeface="Arial" pitchFamily="34" charset="0"/>
+                <a:ea typeface="Arial" pitchFamily="34" charset="-122"/>
+                <a:cs typeface="Arial" pitchFamily="34" charset="-120"/>
+              </a:rPr>
               <a:t>Our Direction</a:t>
             </a:r>
             <a:endParaRPr lang="en-US" sz="4400" dirty="0"/>
@@ -1715,7 +1771,7 @@
       </p:sp>
       <p:sp>
         <p:nvSpPr>
-          <p:cNvPr id="5" name="Text 2"/>
+          <p:cNvPr id="6" name="Text 3"/>
           <p:cNvSpPr txBox="1"/>
           <p:nvPr/>
         </p:nvSpPr>
@@ -1740,7 +1796,7 @@
             <a:r>
               <a:rPr lang="en-US" sz="1800" i="1" dirty="0">
                 <a:solidFill>
-                  <a:srgbClr val="D5DEE8"/>
+                  <a:srgbClr val="F1E1E7"/>
                 </a:solidFill>
                 <a:latin typeface="Cambria" pitchFamily="34" charset="0"/>
                 <a:ea typeface="Cambria" pitchFamily="34" charset="-122"/>
@@ -1754,7 +1810,7 @@
       </p:sp>
       <p:sp>
         <p:nvSpPr>
-          <p:cNvPr id="6" name="Text 3"/>
+          <p:cNvPr id="7" name="Text 4"/>
           <p:cNvSpPr txBox="1"/>
           <p:nvPr/>
         </p:nvSpPr>
@@ -1779,7 +1835,7 @@
             <a:r>
               <a:rPr lang="en-US" sz="1000" spc="100" kern="0" dirty="0">
                 <a:solidFill>
-                  <a:srgbClr val="8FA3B8"/>
+                  <a:srgbClr val="D2B3BF"/>
                 </a:solidFill>
                 <a:latin typeface="Arial" pitchFamily="34" charset="0"/>
                 <a:ea typeface="Arial" pitchFamily="34" charset="-122"/>
@@ -1873,7 +1929,7 @@
             <a:r>
               <a:rPr lang="en-US" sz="6000" b="1" dirty="0">
                 <a:solidFill>
-                  <a:srgbClr val="C8A04A"/>
+                  <a:srgbClr val="D6D9DE"/>
                 </a:solidFill>
                 <a:latin typeface="Arial" pitchFamily="34" charset="0"/>
                 <a:ea typeface="Arial" pitchFamily="34" charset="-122"/>
@@ -1912,7 +1968,7 @@
             <a:r>
               <a:rPr lang="en-US" sz="1100" b="1" spc="500" kern="0" dirty="0">
                 <a:solidFill>
-                  <a:srgbClr val="D5DEE8"/>
+                  <a:srgbClr val="F1E1E7"/>
                 </a:solidFill>
                 <a:latin typeface="Arial" pitchFamily="34" charset="0"/>
                 <a:ea typeface="Arial" pitchFamily="34" charset="-122"/>
@@ -2024,7 +2080,7 @@
             <a:r>
               <a:rPr lang="en-US" sz="800" spc="200" kern="0" dirty="0">
                 <a:solidFill>
-                  <a:srgbClr val="8FA3B8"/>
+                  <a:srgbClr val="D2B3BF"/>
                 </a:solidFill>
                 <a:latin typeface="Arial" pitchFamily="34" charset="0"/>
                 <a:ea typeface="Arial" pitchFamily="34" charset="-122"/>
@@ -2063,7 +2119,7 @@
             <a:r>
               <a:rPr lang="en-US" sz="800" dirty="0">
                 <a:solidFill>
-                  <a:srgbClr val="8A94A1"/>
+                  <a:srgbClr val="9A8C92"/>
                 </a:solidFill>
                 <a:latin typeface="Arial" pitchFamily="34" charset="0"/>
                 <a:ea typeface="Arial" pitchFamily="34" charset="-122"/>
@@ -2091,8 +2147,8 @@
         </p:blipFill>
         <p:spPr>
           <a:xfrm>
-            <a:off x="7452360" y="274320"/>
-            <a:ext cx="1325880" cy="414337"/>
+            <a:off x="8211312" y="182880"/>
+            <a:ext cx="566928" cy="566928"/>
           </a:xfrm>
           <a:prstGeom prst="rect">
             <a:avLst/>
@@ -2114,11 +2170,11 @@
             <a:avLst/>
           </a:prstGeom>
           <a:solidFill>
-            <a:srgbClr val="F4ECD8"/>
+            <a:srgbClr val="F9E8EE"/>
           </a:solidFill>
           <a:ln w="12700">
             <a:solidFill>
-              <a:srgbClr val="F4ECD8"/>
+              <a:srgbClr val="F9E8EE"/>
             </a:solidFill>
             <a:prstDash val="solid"/>
           </a:ln>
@@ -2175,7 +2231,7 @@
             <a:r>
               <a:rPr lang="en-US" sz="1500" dirty="0">
                 <a:solidFill>
-                  <a:srgbClr val="1B2733"/>
+                  <a:srgbClr val="221A1D"/>
                 </a:solidFill>
                 <a:latin typeface="Calibri" pitchFamily="34" charset="0"/>
                 <a:ea typeface="Calibri" pitchFamily="34" charset="-122"/>
@@ -2202,11 +2258,11 @@
             <a:avLst/>
           </a:prstGeom>
           <a:solidFill>
-            <a:srgbClr val="F4ECD8"/>
+            <a:srgbClr val="F9E8EE"/>
           </a:solidFill>
           <a:ln w="12700">
             <a:solidFill>
-              <a:srgbClr val="F4ECD8"/>
+              <a:srgbClr val="F9E8EE"/>
             </a:solidFill>
             <a:prstDash val="solid"/>
           </a:ln>
@@ -2263,7 +2319,7 @@
             <a:r>
               <a:rPr lang="en-US" sz="1500" dirty="0">
                 <a:solidFill>
-                  <a:srgbClr val="1B2733"/>
+                  <a:srgbClr val="221A1D"/>
                 </a:solidFill>
                 <a:latin typeface="Calibri" pitchFamily="34" charset="0"/>
                 <a:ea typeface="Calibri" pitchFamily="34" charset="-122"/>
@@ -2290,11 +2346,11 @@
             <a:avLst/>
           </a:prstGeom>
           <a:solidFill>
-            <a:srgbClr val="F4ECD8"/>
+            <a:srgbClr val="F9E8EE"/>
           </a:solidFill>
           <a:ln w="12700">
             <a:solidFill>
-              <a:srgbClr val="F4ECD8"/>
+              <a:srgbClr val="F9E8EE"/>
             </a:solidFill>
             <a:prstDash val="solid"/>
           </a:ln>
@@ -2351,7 +2407,7 @@
             <a:r>
               <a:rPr lang="en-US" sz="1500" dirty="0">
                 <a:solidFill>
-                  <a:srgbClr val="1B2733"/>
+                  <a:srgbClr val="221A1D"/>
                 </a:solidFill>
                 <a:latin typeface="Calibri" pitchFamily="34" charset="0"/>
                 <a:ea typeface="Calibri" pitchFamily="34" charset="-122"/>
@@ -2378,11 +2434,11 @@
             <a:avLst/>
           </a:prstGeom>
           <a:solidFill>
-            <a:srgbClr val="F4ECD8"/>
+            <a:srgbClr val="F9E8EE"/>
           </a:solidFill>
           <a:ln w="12700">
             <a:solidFill>
-              <a:srgbClr val="F4ECD8"/>
+              <a:srgbClr val="F9E8EE"/>
             </a:solidFill>
             <a:prstDash val="solid"/>
           </a:ln>
@@ -2439,7 +2495,7 @@
             <a:r>
               <a:rPr lang="en-US" sz="1500" dirty="0">
                 <a:solidFill>
-                  <a:srgbClr val="1B2733"/>
+                  <a:srgbClr val="221A1D"/>
                 </a:solidFill>
                 <a:latin typeface="Calibri" pitchFamily="34" charset="0"/>
                 <a:ea typeface="Calibri" pitchFamily="34" charset="-122"/>
@@ -2468,11 +2524,11 @@
             </a:avLst>
           </a:prstGeom>
           <a:solidFill>
-            <a:srgbClr val="0B1F33"/>
+            <a:srgbClr val="4A0F26"/>
           </a:solidFill>
           <a:ln w="12700">
             <a:solidFill>
-              <a:srgbClr val="0B1F33"/>
+              <a:srgbClr val="4A0F26"/>
             </a:solidFill>
             <a:prstDash val="solid"/>
           </a:ln>
@@ -2555,7 +2611,7 @@
     <p:bg>
       <p:bgPr>
         <a:solidFill>
-          <a:srgbClr val="F4F6F9"/>
+          <a:srgbClr val="F6F4F5"/>
         </a:solidFill>
       </p:bgPr>
     </p:bg>
@@ -2589,8 +2645,8 @@
         </p:blipFill>
         <p:spPr>
           <a:xfrm>
-            <a:off x="7452360" y="274320"/>
-            <a:ext cx="1325880" cy="414337"/>
+            <a:off x="8211312" y="182880"/>
+            <a:ext cx="566928" cy="566928"/>
           </a:xfrm>
           <a:prstGeom prst="rect">
             <a:avLst/>
@@ -2624,7 +2680,7 @@
             <a:r>
               <a:rPr lang="en-US" sz="1000" b="1" spc="400" kern="0" dirty="0">
                 <a:solidFill>
-                  <a:srgbClr val="C8A04A"/>
+                  <a:srgbClr val="B8315A"/>
                 </a:solidFill>
                 <a:latin typeface="Arial" pitchFamily="34" charset="0"/>
                 <a:ea typeface="Arial" pitchFamily="34" charset="-122"/>
@@ -2663,7 +2719,7 @@
             <a:r>
               <a:rPr lang="en-US" sz="800" spc="300" kern="0" dirty="0">
                 <a:solidFill>
-                  <a:srgbClr val="8A94A1"/>
+                  <a:srgbClr val="9A8C92"/>
                 </a:solidFill>
                 <a:latin typeface="Arial" pitchFamily="34" charset="0"/>
                 <a:ea typeface="Arial" pitchFamily="34" charset="-122"/>
@@ -2702,7 +2758,7 @@
             <a:r>
               <a:rPr lang="en-US" sz="800" dirty="0">
                 <a:solidFill>
-                  <a:srgbClr val="8A94A1"/>
+                  <a:srgbClr val="9A8C92"/>
                 </a:solidFill>
                 <a:latin typeface="Arial" pitchFamily="34" charset="0"/>
                 <a:ea typeface="Arial" pitchFamily="34" charset="-122"/>
@@ -2741,7 +2797,7 @@
             <a:r>
               <a:rPr lang="en-US" sz="3000" b="1" dirty="0">
                 <a:solidFill>
-                  <a:srgbClr val="0B1F33"/>
+                  <a:srgbClr val="4A0F26"/>
                 </a:solidFill>
                 <a:latin typeface="Arial" pitchFamily="34" charset="0"/>
                 <a:ea typeface="Arial" pitchFamily="34" charset="-122"/>
@@ -2780,7 +2836,7 @@
           </a:ln>
           <a:effectLst>
             <a:outerShdw sx="100000" sy="100000" kx="0" ky="0" algn="bl" rotWithShape="0" blurRad="152400" dist="38100" dir="5400000">
-              <a:srgbClr val="0B1F33">
+              <a:srgbClr val="4A0F26">
                 <a:alpha val="12000"/>
               </a:srgbClr>
             </a:outerShdw>
@@ -2802,11 +2858,11 @@
             <a:avLst/>
           </a:prstGeom>
           <a:solidFill>
-            <a:srgbClr val="0B1F33"/>
+            <a:srgbClr val="4A0F26"/>
           </a:solidFill>
           <a:ln w="12700">
             <a:solidFill>
-              <a:srgbClr val="0B1F33"/>
+              <a:srgbClr val="4A0F26"/>
             </a:solidFill>
             <a:prstDash val="solid"/>
           </a:ln>
@@ -2863,7 +2919,7 @@
             <a:r>
               <a:rPr lang="en-US" sz="1400" b="1" dirty="0">
                 <a:solidFill>
-                  <a:srgbClr val="0B1F33"/>
+                  <a:srgbClr val="4A0F26"/>
                 </a:solidFill>
                 <a:latin typeface="Arial" pitchFamily="34" charset="0"/>
                 <a:ea typeface="Arial" pitchFamily="34" charset="-122"/>
@@ -2902,7 +2958,7 @@
             <a:r>
               <a:rPr lang="en-US" sz="1300" dirty="0">
                 <a:solidFill>
-                  <a:srgbClr val="5F6B7A"/>
+                  <a:srgbClr val="6B6166"/>
                 </a:solidFill>
                 <a:latin typeface="Calibri" pitchFamily="34" charset="0"/>
                 <a:ea typeface="Calibri" pitchFamily="34" charset="-122"/>
@@ -2941,7 +2997,7 @@
           </a:ln>
           <a:effectLst>
             <a:outerShdw sx="100000" sy="100000" kx="0" ky="0" algn="bl" rotWithShape="0" blurRad="152400" dist="38100" dir="5400000">
-              <a:srgbClr val="0B1F33">
+              <a:srgbClr val="4A0F26">
                 <a:alpha val="12000"/>
               </a:srgbClr>
             </a:outerShdw>
@@ -2963,11 +3019,11 @@
             <a:avLst/>
           </a:prstGeom>
           <a:solidFill>
-            <a:srgbClr val="0B1F33"/>
+            <a:srgbClr val="4A0F26"/>
           </a:solidFill>
           <a:ln w="12700">
             <a:solidFill>
-              <a:srgbClr val="0B1F33"/>
+              <a:srgbClr val="4A0F26"/>
             </a:solidFill>
             <a:prstDash val="solid"/>
           </a:ln>
@@ -3024,7 +3080,7 @@
             <a:r>
               <a:rPr lang="en-US" sz="1400" b="1" dirty="0">
                 <a:solidFill>
-                  <a:srgbClr val="0B1F33"/>
+                  <a:srgbClr val="4A0F26"/>
                 </a:solidFill>
                 <a:latin typeface="Arial" pitchFamily="34" charset="0"/>
                 <a:ea typeface="Arial" pitchFamily="34" charset="-122"/>
@@ -3063,7 +3119,7 @@
             <a:r>
               <a:rPr lang="en-US" sz="1300" dirty="0">
                 <a:solidFill>
-                  <a:srgbClr val="5F6B7A"/>
+                  <a:srgbClr val="6B6166"/>
                 </a:solidFill>
                 <a:latin typeface="Calibri" pitchFamily="34" charset="0"/>
                 <a:ea typeface="Calibri" pitchFamily="34" charset="-122"/>
@@ -3102,7 +3158,7 @@
           </a:ln>
           <a:effectLst>
             <a:outerShdw sx="100000" sy="100000" kx="0" ky="0" algn="bl" rotWithShape="0" blurRad="152400" dist="38100" dir="5400000">
-              <a:srgbClr val="0B1F33">
+              <a:srgbClr val="4A0F26">
                 <a:alpha val="12000"/>
               </a:srgbClr>
             </a:outerShdw>
@@ -3124,11 +3180,11 @@
             <a:avLst/>
           </a:prstGeom>
           <a:solidFill>
-            <a:srgbClr val="0B1F33"/>
+            <a:srgbClr val="4A0F26"/>
           </a:solidFill>
           <a:ln w="12700">
             <a:solidFill>
-              <a:srgbClr val="0B1F33"/>
+              <a:srgbClr val="4A0F26"/>
             </a:solidFill>
             <a:prstDash val="solid"/>
           </a:ln>
@@ -3185,7 +3241,7 @@
             <a:r>
               <a:rPr lang="en-US" sz="1400" b="1" dirty="0">
                 <a:solidFill>
-                  <a:srgbClr val="0B1F33"/>
+                  <a:srgbClr val="4A0F26"/>
                 </a:solidFill>
                 <a:latin typeface="Arial" pitchFamily="34" charset="0"/>
                 <a:ea typeface="Arial" pitchFamily="34" charset="-122"/>
@@ -3224,7 +3280,7 @@
             <a:r>
               <a:rPr lang="en-US" sz="1300" dirty="0">
                 <a:solidFill>
-                  <a:srgbClr val="5F6B7A"/>
+                  <a:srgbClr val="6B6166"/>
                 </a:solidFill>
                 <a:latin typeface="Calibri" pitchFamily="34" charset="0"/>
                 <a:ea typeface="Calibri" pitchFamily="34" charset="-122"/>
@@ -3263,7 +3319,7 @@
           </a:ln>
           <a:effectLst>
             <a:outerShdw sx="100000" sy="100000" kx="0" ky="0" algn="bl" rotWithShape="0" blurRad="152400" dist="38100" dir="5400000">
-              <a:srgbClr val="0B1F33">
+              <a:srgbClr val="4A0F26">
                 <a:alpha val="12000"/>
               </a:srgbClr>
             </a:outerShdw>
@@ -3285,11 +3341,11 @@
             <a:avLst/>
           </a:prstGeom>
           <a:solidFill>
-            <a:srgbClr val="0B1F33"/>
+            <a:srgbClr val="4A0F26"/>
           </a:solidFill>
           <a:ln w="12700">
             <a:solidFill>
-              <a:srgbClr val="0B1F33"/>
+              <a:srgbClr val="4A0F26"/>
             </a:solidFill>
             <a:prstDash val="solid"/>
           </a:ln>
@@ -3346,7 +3402,7 @@
             <a:r>
               <a:rPr lang="en-US" sz="1400" b="1" dirty="0">
                 <a:solidFill>
-                  <a:srgbClr val="0B1F33"/>
+                  <a:srgbClr val="4A0F26"/>
                 </a:solidFill>
                 <a:latin typeface="Arial" pitchFamily="34" charset="0"/>
                 <a:ea typeface="Arial" pitchFamily="34" charset="-122"/>
@@ -3385,7 +3441,7 @@
             <a:r>
               <a:rPr lang="en-US" sz="1300" dirty="0">
                 <a:solidFill>
-                  <a:srgbClr val="5F6B7A"/>
+                  <a:srgbClr val="6B6166"/>
                 </a:solidFill>
                 <a:latin typeface="Calibri" pitchFamily="34" charset="0"/>
                 <a:ea typeface="Calibri" pitchFamily="34" charset="-122"/>
@@ -3414,17 +3470,17 @@
             </a:avLst>
           </a:prstGeom>
           <a:solidFill>
-            <a:srgbClr val="0B1F33"/>
+            <a:srgbClr val="4A0F26"/>
           </a:solidFill>
           <a:ln w="12700">
             <a:solidFill>
-              <a:srgbClr val="0B1F33"/>
+              <a:srgbClr val="4A0F26"/>
             </a:solidFill>
             <a:prstDash val="solid"/>
           </a:ln>
           <a:effectLst>
             <a:outerShdw sx="100000" sy="100000" kx="0" ky="0" algn="bl" rotWithShape="0" blurRad="152400" dist="38100" dir="5400000">
-              <a:srgbClr val="0B1F33">
+              <a:srgbClr val="4A0F26">
                 <a:alpha val="12000"/>
               </a:srgbClr>
             </a:outerShdw>
@@ -3521,7 +3577,7 @@
             <a:r>
               <a:rPr lang="en-US" sz="900" b="1" spc="400" kern="0" dirty="0">
                 <a:solidFill>
-                  <a:srgbClr val="C8A04A"/>
+                  <a:srgbClr val="D6D9DE"/>
                 </a:solidFill>
                 <a:latin typeface="Arial" pitchFamily="34" charset="0"/>
                 <a:ea typeface="Arial" pitchFamily="34" charset="-122"/>
@@ -3581,8 +3637,8 @@
         </p:blipFill>
         <p:spPr>
           <a:xfrm>
-            <a:off x="7452360" y="274320"/>
-            <a:ext cx="1325880" cy="414337"/>
+            <a:off x="8211312" y="182880"/>
+            <a:ext cx="566928" cy="566928"/>
           </a:xfrm>
           <a:prstGeom prst="rect">
             <a:avLst/>
@@ -3616,7 +3672,7 @@
             <a:r>
               <a:rPr lang="en-US" sz="1000" b="1" spc="400" kern="0" dirty="0">
                 <a:solidFill>
-                  <a:srgbClr val="C8A04A"/>
+                  <a:srgbClr val="B8315A"/>
                 </a:solidFill>
                 <a:latin typeface="Arial" pitchFamily="34" charset="0"/>
                 <a:ea typeface="Arial" pitchFamily="34" charset="-122"/>
@@ -3655,7 +3711,7 @@
             <a:r>
               <a:rPr lang="en-US" sz="800" spc="300" kern="0" dirty="0">
                 <a:solidFill>
-                  <a:srgbClr val="8A94A1"/>
+                  <a:srgbClr val="9A8C92"/>
                 </a:solidFill>
                 <a:latin typeface="Arial" pitchFamily="34" charset="0"/>
                 <a:ea typeface="Arial" pitchFamily="34" charset="-122"/>
@@ -3694,7 +3750,7 @@
             <a:r>
               <a:rPr lang="en-US" sz="800" dirty="0">
                 <a:solidFill>
-                  <a:srgbClr val="8A94A1"/>
+                  <a:srgbClr val="9A8C92"/>
                 </a:solidFill>
                 <a:latin typeface="Arial" pitchFamily="34" charset="0"/>
                 <a:ea typeface="Arial" pitchFamily="34" charset="-122"/>
@@ -3733,7 +3789,7 @@
             <a:r>
               <a:rPr lang="en-US" sz="2800" b="1" dirty="0">
                 <a:solidFill>
-                  <a:srgbClr val="0B1F33"/>
+                  <a:srgbClr val="4A0F26"/>
                 </a:solidFill>
                 <a:latin typeface="Arial" pitchFamily="34" charset="0"/>
                 <a:ea typeface="Arial" pitchFamily="34" charset="-122"/>
@@ -3747,7 +3803,7 @@
             <a:r>
               <a:rPr lang="en-US" sz="2800" b="1" dirty="0">
                 <a:solidFill>
-                  <a:srgbClr val="0B1F33"/>
+                  <a:srgbClr val="4A0F26"/>
                 </a:solidFill>
                 <a:latin typeface="Arial" pitchFamily="34" charset="0"/>
                 <a:ea typeface="Arial" pitchFamily="34" charset="-122"/>
@@ -3761,7 +3817,7 @@
             <a:r>
               <a:rPr lang="en-US" sz="2800" b="1" dirty="0">
                 <a:solidFill>
-                  <a:srgbClr val="C8A04A"/>
+                  <a:srgbClr val="B8315A"/>
                 </a:solidFill>
                 <a:latin typeface="Arial" pitchFamily="34" charset="0"/>
                 <a:ea typeface="Arial" pitchFamily="34" charset="-122"/>
@@ -3790,7 +3846,7 @@
           <a:noFill/>
           <a:ln w="19050">
             <a:solidFill>
-              <a:srgbClr val="D9C38F"/>
+              <a:srgbClr val="E3A5B8"/>
             </a:solidFill>
             <a:prstDash val="dash"/>
           </a:ln>
@@ -3811,11 +3867,11 @@
             <a:avLst/>
           </a:prstGeom>
           <a:solidFill>
-            <a:srgbClr val="0B1F33"/>
+            <a:srgbClr val="4A0F26"/>
           </a:solidFill>
           <a:ln w="12700">
             <a:solidFill>
-              <a:srgbClr val="0B1F33"/>
+              <a:srgbClr val="4A0F26"/>
             </a:solidFill>
             <a:prstDash val="solid"/>
           </a:ln>
@@ -3872,7 +3928,7 @@
             <a:r>
               <a:rPr lang="en-US" sz="900" b="1" spc="300" kern="0" dirty="0">
                 <a:solidFill>
-                  <a:srgbClr val="C8A04A"/>
+                  <a:srgbClr val="B8315A"/>
                 </a:solidFill>
                 <a:latin typeface="Arial" pitchFamily="34" charset="0"/>
                 <a:ea typeface="Arial" pitchFamily="34" charset="-122"/>
@@ -3911,7 +3967,7 @@
             <a:r>
               <a:rPr lang="en-US" sz="1500" b="1" dirty="0">
                 <a:solidFill>
-                  <a:srgbClr val="0B1F33"/>
+                  <a:srgbClr val="4A0F26"/>
                 </a:solidFill>
                 <a:latin typeface="Arial" pitchFamily="34" charset="0"/>
                 <a:ea typeface="Arial" pitchFamily="34" charset="-122"/>
@@ -3950,7 +4006,7 @@
             <a:r>
               <a:rPr lang="en-US" sz="1300" dirty="0">
                 <a:solidFill>
-                  <a:srgbClr val="5F6B7A"/>
+                  <a:srgbClr val="6B6166"/>
                 </a:solidFill>
                 <a:latin typeface="Calibri" pitchFamily="34" charset="0"/>
                 <a:ea typeface="Calibri" pitchFamily="34" charset="-122"/>
@@ -3977,11 +4033,11 @@
             <a:avLst/>
           </a:prstGeom>
           <a:solidFill>
-            <a:srgbClr val="0B1F33"/>
+            <a:srgbClr val="4A0F26"/>
           </a:solidFill>
           <a:ln w="12700">
             <a:solidFill>
-              <a:srgbClr val="0B1F33"/>
+              <a:srgbClr val="4A0F26"/>
             </a:solidFill>
             <a:prstDash val="solid"/>
           </a:ln>
@@ -4038,7 +4094,7 @@
             <a:r>
               <a:rPr lang="en-US" sz="900" b="1" spc="300" kern="0" dirty="0">
                 <a:solidFill>
-                  <a:srgbClr val="C8A04A"/>
+                  <a:srgbClr val="B8315A"/>
                 </a:solidFill>
                 <a:latin typeface="Arial" pitchFamily="34" charset="0"/>
                 <a:ea typeface="Arial" pitchFamily="34" charset="-122"/>
@@ -4077,7 +4133,7 @@
             <a:r>
               <a:rPr lang="en-US" sz="1500" b="1" dirty="0">
                 <a:solidFill>
-                  <a:srgbClr val="0B1F33"/>
+                  <a:srgbClr val="4A0F26"/>
                 </a:solidFill>
                 <a:latin typeface="Arial" pitchFamily="34" charset="0"/>
                 <a:ea typeface="Arial" pitchFamily="34" charset="-122"/>
@@ -4116,7 +4172,7 @@
             <a:r>
               <a:rPr lang="en-US" sz="1300" dirty="0">
                 <a:solidFill>
-                  <a:srgbClr val="5F6B7A"/>
+                  <a:srgbClr val="6B6166"/>
                 </a:solidFill>
                 <a:latin typeface="Calibri" pitchFamily="34" charset="0"/>
                 <a:ea typeface="Calibri" pitchFamily="34" charset="-122"/>
@@ -4143,11 +4199,11 @@
             <a:avLst/>
           </a:prstGeom>
           <a:solidFill>
-            <a:srgbClr val="0B1F33"/>
+            <a:srgbClr val="4A0F26"/>
           </a:solidFill>
           <a:ln w="12700">
             <a:solidFill>
-              <a:srgbClr val="0B1F33"/>
+              <a:srgbClr val="4A0F26"/>
             </a:solidFill>
             <a:prstDash val="solid"/>
           </a:ln>
@@ -4204,7 +4260,7 @@
             <a:r>
               <a:rPr lang="en-US" sz="900" b="1" spc="300" kern="0" dirty="0">
                 <a:solidFill>
-                  <a:srgbClr val="C8A04A"/>
+                  <a:srgbClr val="B8315A"/>
                 </a:solidFill>
                 <a:latin typeface="Arial" pitchFamily="34" charset="0"/>
                 <a:ea typeface="Arial" pitchFamily="34" charset="-122"/>
@@ -4243,7 +4299,7 @@
             <a:r>
               <a:rPr lang="en-US" sz="1500" b="1" dirty="0">
                 <a:solidFill>
-                  <a:srgbClr val="0B1F33"/>
+                  <a:srgbClr val="4A0F26"/>
                 </a:solidFill>
                 <a:latin typeface="Arial" pitchFamily="34" charset="0"/>
                 <a:ea typeface="Arial" pitchFamily="34" charset="-122"/>
@@ -4282,7 +4338,7 @@
             <a:r>
               <a:rPr lang="en-US" sz="1300" dirty="0">
                 <a:solidFill>
-                  <a:srgbClr val="5F6B7A"/>
+                  <a:srgbClr val="6B6166"/>
                 </a:solidFill>
                 <a:latin typeface="Calibri" pitchFamily="34" charset="0"/>
                 <a:ea typeface="Calibri" pitchFamily="34" charset="-122"/>
@@ -4309,11 +4365,11 @@
             <a:avLst/>
           </a:prstGeom>
           <a:solidFill>
-            <a:srgbClr val="0B1F33"/>
+            <a:srgbClr val="4A0F26"/>
           </a:solidFill>
           <a:ln w="12700">
             <a:solidFill>
-              <a:srgbClr val="0B1F33"/>
+              <a:srgbClr val="4A0F26"/>
             </a:solidFill>
             <a:prstDash val="solid"/>
           </a:ln>
@@ -4370,7 +4426,7 @@
             <a:r>
               <a:rPr lang="en-US" sz="900" b="1" spc="300" kern="0" dirty="0">
                 <a:solidFill>
-                  <a:srgbClr val="C8A04A"/>
+                  <a:srgbClr val="B8315A"/>
                 </a:solidFill>
                 <a:latin typeface="Arial" pitchFamily="34" charset="0"/>
                 <a:ea typeface="Arial" pitchFamily="34" charset="-122"/>
@@ -4409,7 +4465,7 @@
             <a:r>
               <a:rPr lang="en-US" sz="1500" b="1" dirty="0">
                 <a:solidFill>
-                  <a:srgbClr val="0B1F33"/>
+                  <a:srgbClr val="4A0F26"/>
                 </a:solidFill>
                 <a:latin typeface="Arial" pitchFamily="34" charset="0"/>
                 <a:ea typeface="Arial" pitchFamily="34" charset="-122"/>
@@ -4448,7 +4504,7 @@
             <a:r>
               <a:rPr lang="en-US" sz="1300" dirty="0">
                 <a:solidFill>
-                  <a:srgbClr val="5F6B7A"/>
+                  <a:srgbClr val="6B6166"/>
                 </a:solidFill>
                 <a:latin typeface="Calibri" pitchFamily="34" charset="0"/>
                 <a:ea typeface="Calibri" pitchFamily="34" charset="-122"/>
@@ -4477,11 +4533,11 @@
             </a:avLst>
           </a:prstGeom>
           <a:solidFill>
-            <a:srgbClr val="F4ECD8"/>
+            <a:srgbClr val="F9E8EE"/>
           </a:solidFill>
           <a:ln w="12700">
             <a:solidFill>
-              <a:srgbClr val="F4ECD8"/>
+              <a:srgbClr val="F9E8EE"/>
             </a:solidFill>
             <a:prstDash val="solid"/>
           </a:ln>
@@ -4538,7 +4594,7 @@
             <a:r>
               <a:rPr lang="en-US" sz="1800" i="1" dirty="0">
                 <a:solidFill>
-                  <a:srgbClr val="0B1F33"/>
+                  <a:srgbClr val="4A0F26"/>
                 </a:solidFill>
                 <a:latin typeface="Cambria" pitchFamily="34" charset="0"/>
                 <a:ea typeface="Cambria" pitchFamily="34" charset="-122"/>
@@ -4605,8 +4661,8 @@
         </p:blipFill>
         <p:spPr>
           <a:xfrm>
-            <a:off x="7452360" y="274320"/>
-            <a:ext cx="1325880" cy="414337"/>
+            <a:off x="8211312" y="182880"/>
+            <a:ext cx="566928" cy="566928"/>
           </a:xfrm>
           <a:prstGeom prst="rect">
             <a:avLst/>
@@ -4640,7 +4696,7 @@
             <a:r>
               <a:rPr lang="en-US" sz="1000" b="1" spc="400" kern="0" dirty="0">
                 <a:solidFill>
-                  <a:srgbClr val="C8A04A"/>
+                  <a:srgbClr val="D6D9DE"/>
                 </a:solidFill>
                 <a:latin typeface="Arial" pitchFamily="34" charset="0"/>
                 <a:ea typeface="Arial" pitchFamily="34" charset="-122"/>
@@ -4679,7 +4735,7 @@
             <a:r>
               <a:rPr lang="en-US" sz="800" spc="300" kern="0" dirty="0">
                 <a:solidFill>
-                  <a:srgbClr val="8FA3B8"/>
+                  <a:srgbClr val="D2B3BF"/>
                 </a:solidFill>
                 <a:latin typeface="Arial" pitchFamily="34" charset="0"/>
                 <a:ea typeface="Arial" pitchFamily="34" charset="-122"/>
@@ -4718,7 +4774,7 @@
             <a:r>
               <a:rPr lang="en-US" sz="800" dirty="0">
                 <a:solidFill>
-                  <a:srgbClr val="8FA3B8"/>
+                  <a:srgbClr val="D2B3BF"/>
                 </a:solidFill>
                 <a:latin typeface="Arial" pitchFamily="34" charset="0"/>
                 <a:ea typeface="Arial" pitchFamily="34" charset="-122"/>
@@ -4792,7 +4848,7 @@
           </a:solidFill>
           <a:ln w="9525">
             <a:solidFill>
-              <a:srgbClr val="3A5776"/>
+              <a:srgbClr val="9C5670"/>
             </a:solidFill>
             <a:prstDash val="solid"/>
           </a:ln>
@@ -4813,11 +4869,11 @@
             <a:avLst/>
           </a:prstGeom>
           <a:solidFill>
-            <a:srgbClr val="C8A04A"/>
+            <a:srgbClr val="D6D9DE"/>
           </a:solidFill>
           <a:ln w="12700">
             <a:solidFill>
-              <a:srgbClr val="C8A04A"/>
+              <a:srgbClr val="D6D9DE"/>
             </a:solidFill>
             <a:prstDash val="solid"/>
           </a:ln>
@@ -4909,7 +4965,7 @@
           </a:solidFill>
           <a:ln w="9525">
             <a:solidFill>
-              <a:srgbClr val="3A5776"/>
+              <a:srgbClr val="9C5670"/>
             </a:solidFill>
             <a:prstDash val="solid"/>
           </a:ln>
@@ -4930,11 +4986,11 @@
             <a:avLst/>
           </a:prstGeom>
           <a:solidFill>
-            <a:srgbClr val="C8A04A"/>
+            <a:srgbClr val="D6D9DE"/>
           </a:solidFill>
           <a:ln w="12700">
             <a:solidFill>
-              <a:srgbClr val="C8A04A"/>
+              <a:srgbClr val="D6D9DE"/>
             </a:solidFill>
             <a:prstDash val="solid"/>
           </a:ln>
@@ -5026,7 +5082,7 @@
           </a:solidFill>
           <a:ln w="9525">
             <a:solidFill>
-              <a:srgbClr val="3A5776"/>
+              <a:srgbClr val="9C5670"/>
             </a:solidFill>
             <a:prstDash val="solid"/>
           </a:ln>
@@ -5047,11 +5103,11 @@
             <a:avLst/>
           </a:prstGeom>
           <a:solidFill>
-            <a:srgbClr val="C8A04A"/>
+            <a:srgbClr val="D6D9DE"/>
           </a:solidFill>
           <a:ln w="12700">
             <a:solidFill>
-              <a:srgbClr val="C8A04A"/>
+              <a:srgbClr val="D6D9DE"/>
             </a:solidFill>
             <a:prstDash val="solid"/>
           </a:ln>
@@ -5143,7 +5199,7 @@
           </a:solidFill>
           <a:ln w="9525">
             <a:solidFill>
-              <a:srgbClr val="3A5776"/>
+              <a:srgbClr val="9C5670"/>
             </a:solidFill>
             <a:prstDash val="solid"/>
           </a:ln>
@@ -5164,11 +5220,11 @@
             <a:avLst/>
           </a:prstGeom>
           <a:solidFill>
-            <a:srgbClr val="C8A04A"/>
+            <a:srgbClr val="D6D9DE"/>
           </a:solidFill>
           <a:ln w="12700">
             <a:solidFill>
-              <a:srgbClr val="C8A04A"/>
+              <a:srgbClr val="D6D9DE"/>
             </a:solidFill>
             <a:prstDash val="solid"/>
           </a:ln>
@@ -5260,7 +5316,7 @@
           </a:solidFill>
           <a:ln w="9525">
             <a:solidFill>
-              <a:srgbClr val="3A5776"/>
+              <a:srgbClr val="9C5670"/>
             </a:solidFill>
             <a:prstDash val="solid"/>
           </a:ln>
@@ -5281,11 +5337,11 @@
             <a:avLst/>
           </a:prstGeom>
           <a:solidFill>
-            <a:srgbClr val="C8A04A"/>
+            <a:srgbClr val="D6D9DE"/>
           </a:solidFill>
           <a:ln w="12700">
             <a:solidFill>
-              <a:srgbClr val="C8A04A"/>
+              <a:srgbClr val="D6D9DE"/>
             </a:solidFill>
             <a:prstDash val="solid"/>
           </a:ln>
@@ -5405,7 +5461,7 @@
             <a:r>
               <a:rPr lang="en-US" sz="2000" i="1" dirty="0">
                 <a:solidFill>
-                  <a:srgbClr val="C8A04A"/>
+                  <a:srgbClr val="F2A7BD"/>
                 </a:solidFill>
                 <a:latin typeface="Cambria" pitchFamily="34" charset="0"/>
                 <a:ea typeface="Cambria" pitchFamily="34" charset="-122"/>
@@ -5465,8 +5521,8 @@
         </p:blipFill>
         <p:spPr>
           <a:xfrm>
-            <a:off x="7452360" y="274320"/>
-            <a:ext cx="1325880" cy="414337"/>
+            <a:off x="8211312" y="182880"/>
+            <a:ext cx="566928" cy="566928"/>
           </a:xfrm>
           <a:prstGeom prst="rect">
             <a:avLst/>
@@ -5500,7 +5556,7 @@
             <a:r>
               <a:rPr lang="en-US" sz="1000" b="1" spc="400" kern="0" dirty="0">
                 <a:solidFill>
-                  <a:srgbClr val="C8A04A"/>
+                  <a:srgbClr val="B8315A"/>
                 </a:solidFill>
                 <a:latin typeface="Arial" pitchFamily="34" charset="0"/>
                 <a:ea typeface="Arial" pitchFamily="34" charset="-122"/>
@@ -5539,7 +5595,7 @@
             <a:r>
               <a:rPr lang="en-US" sz="800" spc="300" kern="0" dirty="0">
                 <a:solidFill>
-                  <a:srgbClr val="8A94A1"/>
+                  <a:srgbClr val="9A8C92"/>
                 </a:solidFill>
                 <a:latin typeface="Arial" pitchFamily="34" charset="0"/>
                 <a:ea typeface="Arial" pitchFamily="34" charset="-122"/>
@@ -5578,7 +5634,7 @@
             <a:r>
               <a:rPr lang="en-US" sz="800" dirty="0">
                 <a:solidFill>
-                  <a:srgbClr val="8A94A1"/>
+                  <a:srgbClr val="9A8C92"/>
                 </a:solidFill>
                 <a:latin typeface="Arial" pitchFamily="34" charset="0"/>
                 <a:ea typeface="Arial" pitchFamily="34" charset="-122"/>
@@ -5617,7 +5673,7 @@
             <a:r>
               <a:rPr lang="en-US" sz="3200" b="1" dirty="0">
                 <a:solidFill>
-                  <a:srgbClr val="0B1F33"/>
+                  <a:srgbClr val="4A0F26"/>
                 </a:solidFill>
                 <a:latin typeface="Arial" pitchFamily="34" charset="0"/>
                 <a:ea typeface="Arial" pitchFamily="34" charset="-122"/>
@@ -5634,7 +5690,7 @@
             <a:r>
               <a:rPr lang="en-US" sz="3200" b="1" dirty="0">
                 <a:solidFill>
-                  <a:srgbClr val="0B1F33"/>
+                  <a:srgbClr val="4A0F26"/>
                 </a:solidFill>
                 <a:latin typeface="Arial" pitchFamily="34" charset="0"/>
                 <a:ea typeface="Arial" pitchFamily="34" charset="-122"/>
@@ -5663,17 +5719,17 @@
             </a:avLst>
           </a:prstGeom>
           <a:solidFill>
-            <a:srgbClr val="0B1F33"/>
+            <a:srgbClr val="4A0F26"/>
           </a:solidFill>
           <a:ln w="12700">
             <a:solidFill>
-              <a:srgbClr val="0B1F33"/>
+              <a:srgbClr val="4A0F26"/>
             </a:solidFill>
             <a:prstDash val="solid"/>
           </a:ln>
           <a:effectLst>
             <a:outerShdw sx="100000" sy="100000" kx="0" ky="0" algn="bl" rotWithShape="0" blurRad="152400" dist="38100" dir="5400000">
-              <a:srgbClr val="0B1F33">
+              <a:srgbClr val="4A0F26">
                 <a:alpha val="12000"/>
               </a:srgbClr>
             </a:outerShdw>
@@ -5758,11 +5814,11 @@
             <a:avLst/>
           </a:prstGeom>
           <a:solidFill>
-            <a:srgbClr val="F4ECD8"/>
+            <a:srgbClr val="F9E8EE"/>
           </a:solidFill>
           <a:ln w="12700">
             <a:solidFill>
-              <a:srgbClr val="F4ECD8"/>
+              <a:srgbClr val="F9E8EE"/>
             </a:solidFill>
             <a:prstDash val="solid"/>
           </a:ln>
@@ -5819,7 +5875,7 @@
             <a:r>
               <a:rPr lang="en-US" sz="1500" dirty="0">
                 <a:solidFill>
-                  <a:srgbClr val="1B2733"/>
+                  <a:srgbClr val="221A1D"/>
                 </a:solidFill>
                 <a:latin typeface="Calibri" pitchFamily="34" charset="0"/>
                 <a:ea typeface="Calibri" pitchFamily="34" charset="-122"/>
@@ -5869,11 +5925,11 @@
             <a:avLst/>
           </a:prstGeom>
           <a:solidFill>
-            <a:srgbClr val="F4ECD8"/>
+            <a:srgbClr val="F9E8EE"/>
           </a:solidFill>
           <a:ln w="12700">
             <a:solidFill>
-              <a:srgbClr val="F4ECD8"/>
+              <a:srgbClr val="F9E8EE"/>
             </a:solidFill>
             <a:prstDash val="solid"/>
           </a:ln>
@@ -5930,7 +5986,7 @@
             <a:r>
               <a:rPr lang="en-US" sz="1500" dirty="0">
                 <a:solidFill>
-                  <a:srgbClr val="1B2733"/>
+                  <a:srgbClr val="221A1D"/>
                 </a:solidFill>
                 <a:latin typeface="Calibri" pitchFamily="34" charset="0"/>
                 <a:ea typeface="Calibri" pitchFamily="34" charset="-122"/>
@@ -5980,11 +6036,11 @@
             <a:avLst/>
           </a:prstGeom>
           <a:solidFill>
-            <a:srgbClr val="F4ECD8"/>
+            <a:srgbClr val="F9E8EE"/>
           </a:solidFill>
           <a:ln w="12700">
             <a:solidFill>
-              <a:srgbClr val="F4ECD8"/>
+              <a:srgbClr val="F9E8EE"/>
             </a:solidFill>
             <a:prstDash val="solid"/>
           </a:ln>
@@ -6041,7 +6097,7 @@
             <a:r>
               <a:rPr lang="en-US" sz="1500" dirty="0">
                 <a:solidFill>
-                  <a:srgbClr val="1B2733"/>
+                  <a:srgbClr val="221A1D"/>
                 </a:solidFill>
                 <a:latin typeface="Calibri" pitchFamily="34" charset="0"/>
                 <a:ea typeface="Calibri" pitchFamily="34" charset="-122"/>
@@ -6091,11 +6147,11 @@
             <a:avLst/>
           </a:prstGeom>
           <a:solidFill>
-            <a:srgbClr val="F4ECD8"/>
+            <a:srgbClr val="F9E8EE"/>
           </a:solidFill>
           <a:ln w="12700">
             <a:solidFill>
-              <a:srgbClr val="F4ECD8"/>
+              <a:srgbClr val="F9E8EE"/>
             </a:solidFill>
             <a:prstDash val="solid"/>
           </a:ln>
@@ -6152,7 +6208,7 @@
             <a:r>
               <a:rPr lang="en-US" sz="1500" dirty="0">
                 <a:solidFill>
-                  <a:srgbClr val="1B2733"/>
+                  <a:srgbClr val="221A1D"/>
                 </a:solidFill>
                 <a:latin typeface="Calibri" pitchFamily="34" charset="0"/>
                 <a:ea typeface="Calibri" pitchFamily="34" charset="-122"/>
@@ -6202,11 +6258,11 @@
             <a:avLst/>
           </a:prstGeom>
           <a:solidFill>
-            <a:srgbClr val="F4ECD8"/>
+            <a:srgbClr val="F9E8EE"/>
           </a:solidFill>
           <a:ln w="12700">
             <a:solidFill>
-              <a:srgbClr val="F4ECD8"/>
+              <a:srgbClr val="F9E8EE"/>
             </a:solidFill>
             <a:prstDash val="solid"/>
           </a:ln>
@@ -6263,7 +6319,7 @@
             <a:r>
               <a:rPr lang="en-US" sz="1500" dirty="0">
                 <a:solidFill>
-                  <a:srgbClr val="1B2733"/>
+                  <a:srgbClr val="221A1D"/>
                 </a:solidFill>
                 <a:latin typeface="Calibri" pitchFamily="34" charset="0"/>
                 <a:ea typeface="Calibri" pitchFamily="34" charset="-122"/>
@@ -6289,7 +6345,7 @@
     <p:bg>
       <p:bgPr>
         <a:solidFill>
-          <a:srgbClr val="F4F6F9"/>
+          <a:srgbClr val="F6F4F5"/>
         </a:solidFill>
       </p:bgPr>
     </p:bg>
@@ -6346,8 +6402,8 @@
         </p:blipFill>
         <p:spPr>
           <a:xfrm>
-            <a:off x="7452360" y="274320"/>
-            <a:ext cx="1325880" cy="414337"/>
+            <a:off x="8211312" y="182880"/>
+            <a:ext cx="566928" cy="566928"/>
           </a:xfrm>
           <a:prstGeom prst="rect">
             <a:avLst/>
@@ -6381,7 +6437,7 @@
             <a:r>
               <a:rPr lang="en-US" sz="1000" b="1" spc="400" kern="0" dirty="0">
                 <a:solidFill>
-                  <a:srgbClr val="C8A04A"/>
+                  <a:srgbClr val="B8315A"/>
                 </a:solidFill>
                 <a:latin typeface="Arial" pitchFamily="34" charset="0"/>
                 <a:ea typeface="Arial" pitchFamily="34" charset="-122"/>
@@ -6420,7 +6476,7 @@
             <a:r>
               <a:rPr lang="en-US" sz="800" spc="300" kern="0" dirty="0">
                 <a:solidFill>
-                  <a:srgbClr val="8A94A1"/>
+                  <a:srgbClr val="9A8C92"/>
                 </a:solidFill>
                 <a:latin typeface="Arial" pitchFamily="34" charset="0"/>
                 <a:ea typeface="Arial" pitchFamily="34" charset="-122"/>
@@ -6459,7 +6515,7 @@
             <a:r>
               <a:rPr lang="en-US" sz="800" dirty="0">
                 <a:solidFill>
-                  <a:srgbClr val="8FA3B8"/>
+                  <a:srgbClr val="D2B3BF"/>
                 </a:solidFill>
                 <a:latin typeface="Arial" pitchFamily="34" charset="0"/>
                 <a:ea typeface="Arial" pitchFamily="34" charset="-122"/>
@@ -6498,7 +6554,7 @@
             <a:r>
               <a:rPr lang="en-US" sz="2800" b="1" dirty="0">
                 <a:solidFill>
-                  <a:srgbClr val="0B1F33"/>
+                  <a:srgbClr val="4A0F26"/>
                 </a:solidFill>
                 <a:latin typeface="Arial" pitchFamily="34" charset="0"/>
                 <a:ea typeface="Arial" pitchFamily="34" charset="-122"/>
@@ -6515,7 +6571,7 @@
             <a:r>
               <a:rPr lang="en-US" sz="2800" b="1" dirty="0">
                 <a:solidFill>
-                  <a:srgbClr val="0B1F33"/>
+                  <a:srgbClr val="4A0F26"/>
                 </a:solidFill>
                 <a:latin typeface="Arial" pitchFamily="34" charset="0"/>
                 <a:ea typeface="Arial" pitchFamily="34" charset="-122"/>
@@ -6554,7 +6610,7 @@
             <a:r>
               <a:rPr lang="en-US" sz="1800" b="1" dirty="0">
                 <a:solidFill>
-                  <a:srgbClr val="C8A04A"/>
+                  <a:srgbClr val="B8315A"/>
                 </a:solidFill>
                 <a:latin typeface="Arial" pitchFamily="34" charset="0"/>
                 <a:ea typeface="Arial" pitchFamily="34" charset="-122"/>
@@ -6593,7 +6649,7 @@
             <a:r>
               <a:rPr lang="en-US" sz="1500" dirty="0">
                 <a:solidFill>
-                  <a:srgbClr val="1B2733"/>
+                  <a:srgbClr val="221A1D"/>
                 </a:solidFill>
                 <a:latin typeface="Calibri" pitchFamily="34" charset="0"/>
                 <a:ea typeface="Calibri" pitchFamily="34" charset="-122"/>
@@ -6632,7 +6688,7 @@
             <a:r>
               <a:rPr lang="en-US" sz="1800" b="1" dirty="0">
                 <a:solidFill>
-                  <a:srgbClr val="C8A04A"/>
+                  <a:srgbClr val="B8315A"/>
                 </a:solidFill>
                 <a:latin typeface="Arial" pitchFamily="34" charset="0"/>
                 <a:ea typeface="Arial" pitchFamily="34" charset="-122"/>
@@ -6671,7 +6727,7 @@
             <a:r>
               <a:rPr lang="en-US" sz="1500" dirty="0">
                 <a:solidFill>
-                  <a:srgbClr val="1B2733"/>
+                  <a:srgbClr val="221A1D"/>
                 </a:solidFill>
                 <a:latin typeface="Calibri" pitchFamily="34" charset="0"/>
                 <a:ea typeface="Calibri" pitchFamily="34" charset="-122"/>
@@ -6710,7 +6766,7 @@
             <a:r>
               <a:rPr lang="en-US" sz="1800" b="1" dirty="0">
                 <a:solidFill>
-                  <a:srgbClr val="C8A04A"/>
+                  <a:srgbClr val="B8315A"/>
                 </a:solidFill>
                 <a:latin typeface="Arial" pitchFamily="34" charset="0"/>
                 <a:ea typeface="Arial" pitchFamily="34" charset="-122"/>
@@ -6749,7 +6805,7 @@
             <a:r>
               <a:rPr lang="en-US" sz="1500" dirty="0">
                 <a:solidFill>
-                  <a:srgbClr val="1B2733"/>
+                  <a:srgbClr val="221A1D"/>
                 </a:solidFill>
                 <a:latin typeface="Calibri" pitchFamily="34" charset="0"/>
                 <a:ea typeface="Calibri" pitchFamily="34" charset="-122"/>
@@ -6788,7 +6844,7 @@
             <a:r>
               <a:rPr lang="en-US" sz="1800" b="1" dirty="0">
                 <a:solidFill>
-                  <a:srgbClr val="C8A04A"/>
+                  <a:srgbClr val="B8315A"/>
                 </a:solidFill>
                 <a:latin typeface="Arial" pitchFamily="34" charset="0"/>
                 <a:ea typeface="Arial" pitchFamily="34" charset="-122"/>
@@ -6827,7 +6883,7 @@
             <a:r>
               <a:rPr lang="en-US" sz="1500" dirty="0">
                 <a:solidFill>
-                  <a:srgbClr val="1B2733"/>
+                  <a:srgbClr val="221A1D"/>
                 </a:solidFill>
                 <a:latin typeface="Calibri" pitchFamily="34" charset="0"/>
                 <a:ea typeface="Calibri" pitchFamily="34" charset="-122"/>
@@ -6866,7 +6922,7 @@
             <a:r>
               <a:rPr lang="en-US" sz="1800" b="1" dirty="0">
                 <a:solidFill>
-                  <a:srgbClr val="C8A04A"/>
+                  <a:srgbClr val="B8315A"/>
                 </a:solidFill>
                 <a:latin typeface="Arial" pitchFamily="34" charset="0"/>
                 <a:ea typeface="Arial" pitchFamily="34" charset="-122"/>
@@ -6905,7 +6961,7 @@
             <a:r>
               <a:rPr lang="en-US" sz="1500" dirty="0">
                 <a:solidFill>
-                  <a:srgbClr val="1B2733"/>
+                  <a:srgbClr val="221A1D"/>
                 </a:solidFill>
                 <a:latin typeface="Calibri" pitchFamily="34" charset="0"/>
                 <a:ea typeface="Calibri" pitchFamily="34" charset="-122"/>
@@ -6932,11 +6988,11 @@
             <a:avLst/>
           </a:prstGeom>
           <a:solidFill>
-            <a:srgbClr val="C8A04A"/>
+            <a:srgbClr val="D6D9DE"/>
           </a:solidFill>
           <a:ln w="12700">
             <a:solidFill>
-              <a:srgbClr val="C8A04A"/>
+              <a:srgbClr val="D6D9DE"/>
             </a:solidFill>
             <a:prstDash val="solid"/>
           </a:ln>
@@ -7032,7 +7088,7 @@
             <a:r>
               <a:rPr lang="en-US" sz="900" b="1" spc="400" kern="0" dirty="0">
                 <a:solidFill>
-                  <a:srgbClr val="C8A04A"/>
+                  <a:srgbClr val="D6D9DE"/>
                 </a:solidFill>
                 <a:latin typeface="Arial" pitchFamily="34" charset="0"/>
                 <a:ea typeface="Arial" pitchFamily="34" charset="-122"/>
@@ -7092,8 +7148,8 @@
         </p:blipFill>
         <p:spPr>
           <a:xfrm>
-            <a:off x="7452360" y="274320"/>
-            <a:ext cx="1325880" cy="414337"/>
+            <a:off x="8211312" y="182880"/>
+            <a:ext cx="566928" cy="566928"/>
           </a:xfrm>
           <a:prstGeom prst="rect">
             <a:avLst/>
@@ -7127,7 +7183,7 @@
             <a:r>
               <a:rPr lang="en-US" sz="1000" b="1" spc="400" kern="0" dirty="0">
                 <a:solidFill>
-                  <a:srgbClr val="C8A04A"/>
+                  <a:srgbClr val="B8315A"/>
                 </a:solidFill>
                 <a:latin typeface="Arial" pitchFamily="34" charset="0"/>
                 <a:ea typeface="Arial" pitchFamily="34" charset="-122"/>
@@ -7166,7 +7222,7 @@
             <a:r>
               <a:rPr lang="en-US" sz="800" spc="300" kern="0" dirty="0">
                 <a:solidFill>
-                  <a:srgbClr val="8A94A1"/>
+                  <a:srgbClr val="9A8C92"/>
                 </a:solidFill>
                 <a:latin typeface="Arial" pitchFamily="34" charset="0"/>
                 <a:ea typeface="Arial" pitchFamily="34" charset="-122"/>
@@ -7205,7 +7261,7 @@
             <a:r>
               <a:rPr lang="en-US" sz="800" dirty="0">
                 <a:solidFill>
-                  <a:srgbClr val="8A94A1"/>
+                  <a:srgbClr val="9A8C92"/>
                 </a:solidFill>
                 <a:latin typeface="Arial" pitchFamily="34" charset="0"/>
                 <a:ea typeface="Arial" pitchFamily="34" charset="-122"/>
@@ -7244,7 +7300,7 @@
             <a:r>
               <a:rPr lang="en-US" sz="3000" b="1" dirty="0">
                 <a:solidFill>
-                  <a:srgbClr val="0B1F33"/>
+                  <a:srgbClr val="4A0F26"/>
                 </a:solidFill>
                 <a:latin typeface="Arial" pitchFamily="34" charset="0"/>
                 <a:ea typeface="Arial" pitchFamily="34" charset="-122"/>
@@ -7273,7 +7329,7 @@
             </a:avLst>
           </a:prstGeom>
           <a:solidFill>
-            <a:srgbClr val="F4F6F9"/>
+            <a:srgbClr val="F6F4F5"/>
           </a:solidFill>
           <a:ln w="12700">
             <a:solidFill>
@@ -7298,11 +7354,11 @@
             <a:avLst/>
           </a:prstGeom>
           <a:solidFill>
-            <a:srgbClr val="0B1F33"/>
+            <a:srgbClr val="4A0F26"/>
           </a:solidFill>
           <a:ln w="12700">
             <a:solidFill>
-              <a:srgbClr val="0B1F33"/>
+              <a:srgbClr val="4A0F26"/>
             </a:solidFill>
             <a:prstDash val="solid"/>
           </a:ln>
@@ -7359,7 +7415,7 @@
             <a:r>
               <a:rPr lang="en-US" sz="1300" dirty="0">
                 <a:solidFill>
-                  <a:srgbClr val="1B2733"/>
+                  <a:srgbClr val="221A1D"/>
                 </a:solidFill>
                 <a:latin typeface="Calibri" pitchFamily="34" charset="0"/>
                 <a:ea typeface="Calibri" pitchFamily="34" charset="-122"/>
@@ -7388,7 +7444,7 @@
             </a:avLst>
           </a:prstGeom>
           <a:solidFill>
-            <a:srgbClr val="F4F6F9"/>
+            <a:srgbClr val="F6F4F5"/>
           </a:solidFill>
           <a:ln w="12700">
             <a:solidFill>
@@ -7413,11 +7469,11 @@
             <a:avLst/>
           </a:prstGeom>
           <a:solidFill>
-            <a:srgbClr val="0B1F33"/>
+            <a:srgbClr val="4A0F26"/>
           </a:solidFill>
           <a:ln w="12700">
             <a:solidFill>
-              <a:srgbClr val="0B1F33"/>
+              <a:srgbClr val="4A0F26"/>
             </a:solidFill>
             <a:prstDash val="solid"/>
           </a:ln>
@@ -7474,7 +7530,7 @@
             <a:r>
               <a:rPr lang="en-US" sz="1300" dirty="0">
                 <a:solidFill>
-                  <a:srgbClr val="1B2733"/>
+                  <a:srgbClr val="221A1D"/>
                 </a:solidFill>
                 <a:latin typeface="Calibri" pitchFamily="34" charset="0"/>
                 <a:ea typeface="Calibri" pitchFamily="34" charset="-122"/>
@@ -7503,7 +7559,7 @@
             </a:avLst>
           </a:prstGeom>
           <a:solidFill>
-            <a:srgbClr val="F4F6F9"/>
+            <a:srgbClr val="F6F4F5"/>
           </a:solidFill>
           <a:ln w="12700">
             <a:solidFill>
@@ -7528,11 +7584,11 @@
             <a:avLst/>
           </a:prstGeom>
           <a:solidFill>
-            <a:srgbClr val="0B1F33"/>
+            <a:srgbClr val="4A0F26"/>
           </a:solidFill>
           <a:ln w="12700">
             <a:solidFill>
-              <a:srgbClr val="0B1F33"/>
+              <a:srgbClr val="4A0F26"/>
             </a:solidFill>
             <a:prstDash val="solid"/>
           </a:ln>
@@ -7589,7 +7645,7 @@
             <a:r>
               <a:rPr lang="en-US" sz="1300" dirty="0">
                 <a:solidFill>
-                  <a:srgbClr val="1B2733"/>
+                  <a:srgbClr val="221A1D"/>
                 </a:solidFill>
                 <a:latin typeface="Calibri" pitchFamily="34" charset="0"/>
                 <a:ea typeface="Calibri" pitchFamily="34" charset="-122"/>
@@ -7618,7 +7674,7 @@
             </a:avLst>
           </a:prstGeom>
           <a:solidFill>
-            <a:srgbClr val="F4F6F9"/>
+            <a:srgbClr val="F6F4F5"/>
           </a:solidFill>
           <a:ln w="12700">
             <a:solidFill>
@@ -7643,11 +7699,11 @@
             <a:avLst/>
           </a:prstGeom>
           <a:solidFill>
-            <a:srgbClr val="0B1F33"/>
+            <a:srgbClr val="4A0F26"/>
           </a:solidFill>
           <a:ln w="12700">
             <a:solidFill>
-              <a:srgbClr val="0B1F33"/>
+              <a:srgbClr val="4A0F26"/>
             </a:solidFill>
             <a:prstDash val="solid"/>
           </a:ln>
@@ -7704,7 +7760,7 @@
             <a:r>
               <a:rPr lang="en-US" sz="1300" dirty="0">
                 <a:solidFill>
-                  <a:srgbClr val="1B2733"/>
+                  <a:srgbClr val="221A1D"/>
                 </a:solidFill>
                 <a:latin typeface="Calibri" pitchFamily="34" charset="0"/>
                 <a:ea typeface="Calibri" pitchFamily="34" charset="-122"/>
@@ -7733,11 +7789,11 @@
             </a:avLst>
           </a:prstGeom>
           <a:solidFill>
-            <a:srgbClr val="0B1F33"/>
+            <a:srgbClr val="4A0F26"/>
           </a:solidFill>
           <a:ln w="12700">
             <a:solidFill>
-              <a:srgbClr val="0B1F33"/>
+              <a:srgbClr val="4A0F26"/>
             </a:solidFill>
             <a:prstDash val="solid"/>
           </a:ln>
@@ -7758,11 +7814,11 @@
             <a:avLst/>
           </a:prstGeom>
           <a:solidFill>
-            <a:srgbClr val="C8A04A"/>
+            <a:srgbClr val="D6D9DE"/>
           </a:solidFill>
           <a:ln w="12700">
             <a:solidFill>
-              <a:srgbClr val="C8A04A"/>
+              <a:srgbClr val="D6D9DE"/>
             </a:solidFill>
             <a:prstDash val="solid"/>
           </a:ln>
@@ -7886,8 +7942,8 @@
         </p:blipFill>
         <p:spPr>
           <a:xfrm>
-            <a:off x="7452360" y="274320"/>
-            <a:ext cx="1325880" cy="414337"/>
+            <a:off x="8211312" y="182880"/>
+            <a:ext cx="566928" cy="566928"/>
           </a:xfrm>
           <a:prstGeom prst="rect">
             <a:avLst/>
@@ -7948,7 +8004,7 @@
             <a:r>
               <a:rPr lang="en-US" sz="3000" dirty="0">
                 <a:solidFill>
-                  <a:srgbClr val="D5DEE8"/>
+                  <a:srgbClr val="F1E1E7"/>
                 </a:solidFill>
                 <a:latin typeface="Cambria" pitchFamily="34" charset="0"/>
                 <a:ea typeface="Cambria" pitchFamily="34" charset="-122"/>
@@ -7985,7 +8041,7 @@
             <a:r>
               <a:rPr lang="en-US" sz="3000" b="1" dirty="0">
                 <a:solidFill>
-                  <a:srgbClr val="C8A04A"/>
+                  <a:srgbClr val="F2A7BD"/>
                 </a:solidFill>
                 <a:latin typeface="Cambria" pitchFamily="34" charset="0"/>
                 <a:ea typeface="Cambria" pitchFamily="34" charset="-122"/>
@@ -8024,7 +8080,7 @@
             <a:r>
               <a:rPr lang="en-US" sz="1100" b="1" spc="600" kern="0" dirty="0">
                 <a:solidFill>
-                  <a:srgbClr val="C8A04A"/>
+                  <a:srgbClr val="D6D9DE"/>
                 </a:solidFill>
                 <a:latin typeface="Arial" pitchFamily="34" charset="0"/>
                 <a:ea typeface="Arial" pitchFamily="34" charset="-122"/>
@@ -8063,7 +8119,7 @@
             <a:r>
               <a:rPr lang="en-US" sz="1000" dirty="0">
                 <a:solidFill>
-                  <a:srgbClr val="8FA3B8"/>
+                  <a:srgbClr val="D2B3BF"/>
                 </a:solidFill>
                 <a:latin typeface="Arial" pitchFamily="34" charset="0"/>
                 <a:ea typeface="Arial" pitchFamily="34" charset="-122"/>
